--- a/Hbit_prezentace.pptx
+++ b/Hbit_prezentace.pptx
@@ -1539,7 +1539,7 @@
       </p:grpSpPr>
       <p:pic>
         <p:nvPicPr>
-          <p:cNvPr id="2" name="Image 0" descr="preencoded.png"/>
+          <p:cNvPr id="3" name="Image 1" descr="preencoded.png"/>
           <p:cNvPicPr>
             <a:picLocks noChangeAspect="1"/>
           </p:cNvPicPr>
@@ -1553,17 +1553,186 @@
         </p:blipFill>
         <p:spPr>
           <a:xfrm>
-            <a:off x="4571886" y="0"/>
-            <a:ext cx="7619809" cy="6858000"/>
+            <a:off x="4666340" y="1425674"/>
+            <a:ext cx="7430802" cy="4006552"/>
           </a:xfrm>
           <a:prstGeom prst="rect">
             <a:avLst/>
           </a:prstGeom>
         </p:spPr>
       </p:pic>
+      <p:sp>
+        <p:nvSpPr>
+          <p:cNvPr id="4" name="Text 0"/>
+          <p:cNvSpPr/>
+          <p:nvPr/>
+        </p:nvSpPr>
+        <p:spPr>
+          <a:xfrm>
+            <a:off x="661475" y="2472234"/>
+            <a:ext cx="3858521" cy="590649"/>
+          </a:xfrm>
+          <a:prstGeom prst="rect">
+            <a:avLst/>
+          </a:prstGeom>
+          <a:noFill/>
+          <a:ln/>
+        </p:spPr>
+        <p:txBody>
+          <a:bodyPr wrap="none" lIns="0" tIns="0" rIns="0" bIns="0" rtlCol="0" anchor="t"/>
+          <a:lstStyle/>
+          <a:p>
+            <a:pPr marL="0" indent="0" algn="l">
+              <a:lnSpc>
+                <a:spcPct val="104000"/>
+              </a:lnSpc>
+              <a:buNone/>
+            </a:pPr>
+            <a:r>
+              <a:rPr lang="en-US" sz="3700" dirty="0">
+                <a:solidFill>
+                  <a:srgbClr val="3B4540"/>
+                </a:solidFill>
+                <a:latin typeface="Fraunces ExtraBold" pitchFamily="34" charset="0"/>
+                <a:ea typeface="Fraunces ExtraBold" pitchFamily="34" charset="-122"/>
+                <a:cs typeface="Fraunces ExtraBold" pitchFamily="34" charset="-120"/>
+              </a:rPr>
+              <a:t>Hbit</a:t>
+            </a:r>
+            <a:endParaRPr lang="en-US" sz="3700" dirty="0"/>
+          </a:p>
+        </p:txBody>
+      </p:sp>
+      <p:sp>
+        <p:nvSpPr>
+          <p:cNvPr id="5" name="Text 1"/>
+          <p:cNvSpPr/>
+          <p:nvPr/>
+        </p:nvSpPr>
+        <p:spPr>
+          <a:xfrm>
+            <a:off x="661475" y="3346351"/>
+            <a:ext cx="3248936" cy="1039416"/>
+          </a:xfrm>
+          <a:prstGeom prst="rect">
+            <a:avLst/>
+          </a:prstGeom>
+          <a:noFill/>
+          <a:ln/>
+        </p:spPr>
+        <p:txBody>
+          <a:bodyPr wrap="square" lIns="0" tIns="0" rIns="0" bIns="0" rtlCol="0" anchor="t">
+            <a:normAutofit/>
+          </a:bodyPr>
+          <a:lstStyle/>
+          <a:p>
+            <a:pPr marL="342900" indent="-342900" algn="l">
+              <a:lnSpc>
+                <a:spcPct val="133000"/>
+              </a:lnSpc>
+              <a:buSzPct val="100000"/>
+              <a:buChar char="•"/>
+            </a:pPr>
+            <a:r>
+              <a:rPr lang="en-US" sz="1450" dirty="0">
+                <a:solidFill>
+                  <a:srgbClr val="405449"/>
+                </a:solidFill>
+                <a:latin typeface="Nobile" pitchFamily="34" charset="0"/>
+                <a:ea typeface="Nobile" pitchFamily="34" charset="-122"/>
+                <a:cs typeface="Nobile" pitchFamily="34" charset="-120"/>
+              </a:rPr>
+              <a:t>Sledování návyků </a:t>
+            </a:r>
+            <a:endParaRPr lang="en-US" sz="1450" dirty="0"/>
+          </a:p>
+          <a:p>
+            <a:pPr marL="342900" indent="-342900" algn="l">
+              <a:lnSpc>
+                <a:spcPct val="133000"/>
+              </a:lnSpc>
+              <a:buSzPct val="100000"/>
+              <a:buChar char="•"/>
+            </a:pPr>
+            <a:r>
+              <a:rPr lang="en-US" sz="1450" dirty="0">
+                <a:solidFill>
+                  <a:srgbClr val="405449"/>
+                </a:solidFill>
+                <a:latin typeface="Nobile" pitchFamily="34" charset="0"/>
+                <a:ea typeface="Nobile" pitchFamily="34" charset="-122"/>
+                <a:cs typeface="Nobile" pitchFamily="34" charset="-120"/>
+              </a:rPr>
+              <a:t>Budování sérií </a:t>
+            </a:r>
+            <a:endParaRPr lang="en-US" sz="1450" dirty="0"/>
+          </a:p>
+          <a:p>
+            <a:pPr marL="342900" indent="-342900" algn="l">
+              <a:lnSpc>
+                <a:spcPct val="133000"/>
+              </a:lnSpc>
+              <a:buSzPct val="100000"/>
+              <a:buChar char="•"/>
+            </a:pPr>
+            <a:r>
+              <a:rPr lang="en-US" sz="1450" dirty="0">
+                <a:solidFill>
+                  <a:srgbClr val="405449"/>
+                </a:solidFill>
+                <a:latin typeface="Nobile" pitchFamily="34" charset="0"/>
+                <a:ea typeface="Nobile" pitchFamily="34" charset="-122"/>
+                <a:cs typeface="Nobile" pitchFamily="34" charset="-120"/>
+              </a:rPr>
+              <a:t>Sdílení s přáteli</a:t>
+            </a:r>
+            <a:endParaRPr lang="en-US" sz="1450" dirty="0"/>
+          </a:p>
+        </p:txBody>
+      </p:sp>
+      <p:sp>
+        <p:nvSpPr>
+          <p:cNvPr id="6" name="TextBox 5">
+            <a:extLst>
+              <a:ext uri="{FF2B5EF4-FFF2-40B4-BE49-F238E27FC236}">
+                <a16:creationId xmlns:a16="http://schemas.microsoft.com/office/drawing/2014/main" id="{AE376A50-4203-9805-2AAA-0441A04609F0}"/>
+              </a:ext>
+            </a:extLst>
+          </p:cNvPr>
+          <p:cNvSpPr txBox="1"/>
+          <p:nvPr/>
+        </p:nvSpPr>
+        <p:spPr>
+          <a:xfrm>
+            <a:off x="-1140644" y="-369332"/>
+            <a:ext cx="184731" cy="369332"/>
+          </a:xfrm>
+          <a:prstGeom prst="rect">
+            <a:avLst/>
+          </a:prstGeom>
+          <a:solidFill>
+            <a:srgbClr val="FAFFFA"/>
+          </a:solidFill>
+        </p:spPr>
+        <p:txBody>
+          <a:bodyPr wrap="none" rtlCol="0">
+            <a:spAutoFit/>
+          </a:bodyPr>
+          <a:lstStyle/>
+          <a:p>
+            <a:endParaRPr lang="en-CZ" dirty="0"/>
+          </a:p>
+        </p:txBody>
+      </p:sp>
       <p:pic>
         <p:nvPicPr>
-          <p:cNvPr id="3" name="Image 1" descr="preencoded.png"/>
+          <p:cNvPr id="7" name="Picture 6">
+            <a:extLst>
+              <a:ext uri="{FF2B5EF4-FFF2-40B4-BE49-F238E27FC236}">
+                <a16:creationId xmlns:a16="http://schemas.microsoft.com/office/drawing/2014/main" id="{EF6F33E6-331A-F56A-4F77-5AAA9B29934D}"/>
+              </a:ext>
+            </a:extLst>
+          </p:cNvPr>
           <p:cNvPicPr>
             <a:picLocks noChangeAspect="1"/>
           </p:cNvPicPr>
@@ -1578,142 +1747,13 @@
         <p:spPr>
           <a:xfrm>
             <a:off x="4666340" y="1425674"/>
-            <a:ext cx="7430802" cy="4006552"/>
+            <a:ext cx="7430802" cy="4103967"/>
           </a:xfrm>
           <a:prstGeom prst="rect">
             <a:avLst/>
           </a:prstGeom>
         </p:spPr>
       </p:pic>
-      <p:sp>
-        <p:nvSpPr>
-          <p:cNvPr id="4" name="Text 0"/>
-          <p:cNvSpPr/>
-          <p:nvPr/>
-        </p:nvSpPr>
-        <p:spPr>
-          <a:xfrm>
-            <a:off x="661475" y="2472234"/>
-            <a:ext cx="3858521" cy="590649"/>
-          </a:xfrm>
-          <a:prstGeom prst="rect">
-            <a:avLst/>
-          </a:prstGeom>
-          <a:noFill/>
-          <a:ln/>
-        </p:spPr>
-        <p:txBody>
-          <a:bodyPr wrap="none" lIns="0" tIns="0" rIns="0" bIns="0" rtlCol="0" anchor="t"/>
-          <a:lstStyle/>
-          <a:p>
-            <a:pPr marL="0" indent="0" algn="l">
-              <a:lnSpc>
-                <a:spcPct val="104000"/>
-              </a:lnSpc>
-              <a:buNone/>
-            </a:pPr>
-            <a:r>
-              <a:rPr lang="en-US" sz="3700" dirty="0">
-                <a:solidFill>
-                  <a:srgbClr val="3B4540"/>
-                </a:solidFill>
-                <a:latin typeface="Fraunces ExtraBold" pitchFamily="34" charset="0"/>
-                <a:ea typeface="Fraunces ExtraBold" pitchFamily="34" charset="-122"/>
-                <a:cs typeface="Fraunces ExtraBold" pitchFamily="34" charset="-120"/>
-              </a:rPr>
-              <a:t>Hbit</a:t>
-            </a:r>
-            <a:endParaRPr lang="en-US" sz="3700" dirty="0"/>
-          </a:p>
-        </p:txBody>
-      </p:sp>
-      <p:sp>
-        <p:nvSpPr>
-          <p:cNvPr id="5" name="Text 1"/>
-          <p:cNvSpPr/>
-          <p:nvPr/>
-        </p:nvSpPr>
-        <p:spPr>
-          <a:xfrm>
-            <a:off x="661475" y="3346351"/>
-            <a:ext cx="3248936" cy="1039416"/>
-          </a:xfrm>
-          <a:prstGeom prst="rect">
-            <a:avLst/>
-          </a:prstGeom>
-          <a:noFill/>
-          <a:ln/>
-        </p:spPr>
-        <p:txBody>
-          <a:bodyPr wrap="square" lIns="0" tIns="0" rIns="0" bIns="0" rtlCol="0" anchor="t">
-            <a:normAutofit/>
-          </a:bodyPr>
-          <a:lstStyle/>
-          <a:p>
-            <a:pPr marL="342900" indent="-342900" algn="l">
-              <a:lnSpc>
-                <a:spcPct val="133000"/>
-              </a:lnSpc>
-              <a:buSzPct val="100000"/>
-              <a:buChar char="•"/>
-            </a:pPr>
-            <a:r>
-              <a:rPr lang="en-US" sz="1450" dirty="0">
-                <a:solidFill>
-                  <a:srgbClr val="405449"/>
-                </a:solidFill>
-                <a:latin typeface="Nobile" pitchFamily="34" charset="0"/>
-                <a:ea typeface="Nobile" pitchFamily="34" charset="-122"/>
-                <a:cs typeface="Nobile" pitchFamily="34" charset="-120"/>
-              </a:rPr>
-              <a:t>Sledování návyků </a:t>
-            </a:r>
-            <a:endParaRPr lang="en-US" sz="1450" dirty="0"/>
-          </a:p>
-          <a:p>
-            <a:pPr marL="342900" indent="-342900" algn="l">
-              <a:lnSpc>
-                <a:spcPct val="133000"/>
-              </a:lnSpc>
-              <a:buSzPct val="100000"/>
-              <a:buChar char="•"/>
-            </a:pPr>
-            <a:r>
-              <a:rPr lang="en-US" sz="1450" dirty="0">
-                <a:solidFill>
-                  <a:srgbClr val="405449"/>
-                </a:solidFill>
-                <a:latin typeface="Nobile" pitchFamily="34" charset="0"/>
-                <a:ea typeface="Nobile" pitchFamily="34" charset="-122"/>
-                <a:cs typeface="Nobile" pitchFamily="34" charset="-120"/>
-              </a:rPr>
-              <a:t>Budování sérií </a:t>
-            </a:r>
-            <a:endParaRPr lang="en-US" sz="1450" dirty="0"/>
-          </a:p>
-          <a:p>
-            <a:pPr marL="342900" indent="-342900" algn="l">
-              <a:lnSpc>
-                <a:spcPct val="133000"/>
-              </a:lnSpc>
-              <a:buSzPct val="100000"/>
-              <a:buChar char="•"/>
-            </a:pPr>
-            <a:r>
-              <a:rPr lang="en-US" sz="1450" dirty="0">
-                <a:solidFill>
-                  <a:srgbClr val="405449"/>
-                </a:solidFill>
-                <a:latin typeface="Nobile" pitchFamily="34" charset="0"/>
-                <a:ea typeface="Nobile" pitchFamily="34" charset="-122"/>
-                <a:cs typeface="Nobile" pitchFamily="34" charset="-120"/>
-              </a:rPr>
-              <a:t>Sdílení s přáteli</a:t>
-            </a:r>
-            <a:endParaRPr lang="en-US" sz="1450" dirty="0"/>
-          </a:p>
-        </p:txBody>
-      </p:sp>
     </p:spTree>
   </p:cSld>
   <p:clrMapOvr>
@@ -2753,36 +2793,57 @@
       </p:sp>
       <p:sp>
         <p:nvSpPr>
-          <p:cNvPr id="8" name="Shape 5"/>
-          <p:cNvSpPr/>
-          <p:nvPr/>
-        </p:nvSpPr>
-        <p:spPr>
-          <a:xfrm>
-            <a:off x="8002090" y="5011638"/>
-            <a:ext cx="3534282" cy="877491"/>
-          </a:xfrm>
-          <a:prstGeom prst="roundRect">
-            <a:avLst>
-              <a:gd name="adj" fmla="val 17448"/>
-            </a:avLst>
-          </a:prstGeom>
-          <a:solidFill>
-            <a:srgbClr val="CCE6D1"/>
-          </a:solidFill>
-          <a:ln/>
-        </p:spPr>
-        <p:txBody>
-          <a:bodyPr/>
-          <a:lstStyle/>
-          <a:p>
-            <a:endParaRPr lang="en-CZ"/>
+          <p:cNvPr id="10" name="Text 6"/>
+          <p:cNvSpPr/>
+          <p:nvPr/>
+        </p:nvSpPr>
+        <p:spPr>
+          <a:xfrm>
+            <a:off x="7996145" y="4718546"/>
+            <a:ext cx="2811491" cy="517128"/>
+          </a:xfrm>
+          <a:prstGeom prst="rect">
+            <a:avLst/>
+          </a:prstGeom>
+          <a:noFill/>
+          <a:ln/>
+        </p:spPr>
+        <p:txBody>
+          <a:bodyPr wrap="square" lIns="0" tIns="0" rIns="0" bIns="0" rtlCol="0" anchor="t">
+            <a:normAutofit/>
+          </a:bodyPr>
+          <a:lstStyle/>
+          <a:p>
+            <a:pPr marL="0" indent="0" algn="l">
+              <a:lnSpc>
+                <a:spcPct val="127000"/>
+              </a:lnSpc>
+              <a:buNone/>
+            </a:pPr>
+            <a:r>
+              <a:rPr lang="en-US" sz="1300" dirty="0">
+                <a:solidFill>
+                  <a:srgbClr val="000000"/>
+                </a:solidFill>
+                <a:latin typeface="Nobile" pitchFamily="34" charset="0"/>
+                <a:ea typeface="Nobile" pitchFamily="34" charset="-122"/>
+                <a:cs typeface="Nobile" pitchFamily="34" charset="-120"/>
+              </a:rPr>
+              <a:t>Přehled hotové práce a statistiky plnění jsou vždy po ruce.</a:t>
+            </a:r>
+            <a:endParaRPr lang="en-US" sz="1300" dirty="0"/>
           </a:p>
         </p:txBody>
       </p:sp>
       <p:pic>
         <p:nvPicPr>
-          <p:cNvPr id="9" name="Image 1" descr="preencoded.png"/>
+          <p:cNvPr id="11" name="Picture 10">
+            <a:extLst>
+              <a:ext uri="{FF2B5EF4-FFF2-40B4-BE49-F238E27FC236}">
+                <a16:creationId xmlns:a16="http://schemas.microsoft.com/office/drawing/2014/main" id="{8DB00956-0C63-763B-B806-657D8901922C}"/>
+              </a:ext>
+            </a:extLst>
+          </p:cNvPr>
           <p:cNvPicPr>
             <a:picLocks noChangeAspect="1"/>
           </p:cNvPicPr>
@@ -2796,58 +2857,44 @@
         </p:blipFill>
         <p:spPr>
           <a:xfrm>
-            <a:off x="8172146" y="5246787"/>
-            <a:ext cx="212620" cy="170061"/>
+            <a:off x="655628" y="2129730"/>
+            <a:ext cx="6227310" cy="3439289"/>
           </a:xfrm>
           <a:prstGeom prst="rect">
             <a:avLst/>
           </a:prstGeom>
         </p:spPr>
       </p:pic>
-      <p:sp>
-        <p:nvSpPr>
-          <p:cNvPr id="10" name="Text 6"/>
-          <p:cNvSpPr/>
-          <p:nvPr/>
-        </p:nvSpPr>
-        <p:spPr>
-          <a:xfrm>
-            <a:off x="8554823" y="5191820"/>
-            <a:ext cx="2811491" cy="517128"/>
-          </a:xfrm>
-          <a:prstGeom prst="rect">
-            <a:avLst/>
-          </a:prstGeom>
-          <a:noFill/>
-          <a:ln/>
-        </p:spPr>
-        <p:txBody>
-          <a:bodyPr wrap="square" lIns="0" tIns="0" rIns="0" bIns="0" rtlCol="0" anchor="t">
-            <a:normAutofit/>
-          </a:bodyPr>
-          <a:lstStyle/>
-          <a:p>
-            <a:pPr marL="0" indent="0" algn="l">
-              <a:lnSpc>
-                <a:spcPct val="127000"/>
-              </a:lnSpc>
-              <a:buNone/>
-            </a:pPr>
-            <a:r>
-              <a:rPr lang="en-US" sz="1300" dirty="0">
-                <a:solidFill>
-                  <a:srgbClr val="000000"/>
-                </a:solidFill>
-                <a:latin typeface="Nobile" pitchFamily="34" charset="0"/>
-                <a:ea typeface="Nobile" pitchFamily="34" charset="-122"/>
-                <a:cs typeface="Nobile" pitchFamily="34" charset="-120"/>
-              </a:rPr>
-              <a:t>Přehled hotové práce a statistiky plnění jsou vždy po ruce.</a:t>
-            </a:r>
-            <a:endParaRPr lang="en-US" sz="1300" dirty="0"/>
-          </a:p>
-        </p:txBody>
-      </p:sp>
+      <p:pic>
+        <p:nvPicPr>
+          <p:cNvPr id="12" name="Picture 11">
+            <a:extLst>
+              <a:ext uri="{FF2B5EF4-FFF2-40B4-BE49-F238E27FC236}">
+                <a16:creationId xmlns:a16="http://schemas.microsoft.com/office/drawing/2014/main" id="{080DDDFD-E9FA-BEFB-A4B5-8636FAD15812}"/>
+              </a:ext>
+            </a:extLst>
+          </p:cNvPr>
+          <p:cNvPicPr>
+            <a:picLocks noChangeAspect="1"/>
+          </p:cNvPicPr>
+          <p:nvPr/>
+        </p:nvPicPr>
+        <p:blipFill>
+          <a:blip r:embed="rId5"/>
+          <a:stretch>
+            <a:fillRect/>
+          </a:stretch>
+        </p:blipFill>
+        <p:spPr>
+          <a:xfrm>
+            <a:off x="667518" y="2129730"/>
+            <a:ext cx="6227310" cy="3452333"/>
+          </a:xfrm>
+          <a:prstGeom prst="rect">
+            <a:avLst/>
+          </a:prstGeom>
+        </p:spPr>
+      </p:pic>
     </p:spTree>
   </p:cSld>
   <p:clrMapOvr>
